--- a/fixtures/sample-vector-pdf-jobs.pptx
+++ b/fixtures/sample-vector-pdf-jobs.pptx
@@ -12,6 +12,21 @@
   <p:sldSz cx="6096000" cy="3429000"/>
   <p:notesSz cx="6858000" cy="9144000"/>
 </p:presentation>
+</file>
+
+<file path=ppt/commentAuthors.xml><?xml version="1.0" encoding="utf-8"?>
+<p:cmAuthorLst xmlns:p="http://schemas.openxmlformats.org/presentationml/2006/main">
+  <p:cmAuthor id="0" name="作者" initials="A" lastIdx="1" clrIdx="0"/>
+</p:cmAuthorLst>
+</file>
+
+<file path=ppt/comments/comment1.xml><?xml version="1.0" encoding="utf-8"?>
+<p:cmLst xmlns:p="http://schemas.openxmlformats.org/presentationml/2006/main">
+  <p:cm authorId="0" idx="1">
+    <p:pos x="381000" y="381000"/>
+    <p:text>批注</p:text>
+  </p:cm>
+</p:cmLst>
 </file>
 
 <file path=ppt/slideLayouts/slideLayout1.xml><?xml version="1.0" encoding="utf-8"?>
